--- a/08-final-submission/final-report/figures/fig-2-data-flow.pptx
+++ b/08-final-submission/final-report/figures/fig-2-data-flow.pptx
@@ -901,7 +901,7 @@
                 <a:ea typeface="맑은 고딕" pitchFamily="34" charset="-122"/>
                 <a:cs typeface="맑은 고딕" pitchFamily="34" charset="-120"/>
               </a:rPr>
-              <a:t>그림 3. 데이터 흐름도 (Data Flow)</a:t>
+              <a:t>그림 2. 데이터 흐름도 (Data Flow)</a:t>
             </a:r>
             <a:endParaRPr lang="en-US" sz="1400" dirty="0"/>
           </a:p>
